--- a/docs/Oh My Node-Presentation.pptx
+++ b/docs/Oh My Node-Presentation.pptx
@@ -19,37 +19,44 @@
   <p:notesSz cx="6858000" cy="9144000"/>
   <p:embeddedFontLst>
     <p:embeddedFont>
-      <p:font typeface="Be Vietnam Pro" panose="020B0604020202020204" charset="0"/>
+      <p:font typeface="League Spartan" panose="020B0604020202020204" charset="0"/>
       <p:regular r:id="rId9"/>
       <p:bold r:id="rId10"/>
-      <p:italic r:id="rId11"/>
-      <p:boldItalic r:id="rId12"/>
+    </p:embeddedFont>
+    <p:embeddedFont>
+      <p:font typeface="Be Vietnam Pro Thin" panose="020B0604020202020204" charset="0"/>
+      <p:regular r:id="rId11"/>
+      <p:bold r:id="rId12"/>
+      <p:italic r:id="rId13"/>
+      <p:boldItalic r:id="rId14"/>
+    </p:embeddedFont>
+    <p:embeddedFont>
+      <p:font typeface="Raleway" panose="020B0604020202020204" charset="-52"/>
+      <p:regular r:id="rId15"/>
+      <p:bold r:id="rId16"/>
+      <p:italic r:id="rId17"/>
+      <p:boldItalic r:id="rId18"/>
+    </p:embeddedFont>
+    <p:embeddedFont>
+      <p:font typeface="Be Vietnam Pro" panose="020B0604020202020204" charset="0"/>
+      <p:regular r:id="rId19"/>
+      <p:bold r:id="rId20"/>
+      <p:italic r:id="rId21"/>
+      <p:boldItalic r:id="rId22"/>
     </p:embeddedFont>
     <p:embeddedFont>
       <p:font typeface="Be Vietnam Pro Medium" panose="020B0604020202020204" charset="0"/>
-      <p:regular r:id="rId13"/>
-      <p:bold r:id="rId14"/>
-      <p:italic r:id="rId15"/>
-      <p:boldItalic r:id="rId16"/>
-    </p:embeddedFont>
-    <p:embeddedFont>
-      <p:font typeface="Be Vietnam Pro Thin" panose="020B0604020202020204" charset="0"/>
-      <p:regular r:id="rId17"/>
-      <p:bold r:id="rId18"/>
-      <p:italic r:id="rId19"/>
-      <p:boldItalic r:id="rId20"/>
-    </p:embeddedFont>
-    <p:embeddedFont>
-      <p:font typeface="League Spartan" panose="020B0604020202020204" charset="0"/>
-      <p:regular r:id="rId21"/>
-      <p:bold r:id="rId22"/>
-    </p:embeddedFont>
-    <p:embeddedFont>
-      <p:font typeface="Raleway" pitchFamily="2" charset="-52"/>
       <p:regular r:id="rId23"/>
       <p:bold r:id="rId24"/>
       <p:italic r:id="rId25"/>
       <p:boldItalic r:id="rId26"/>
+    </p:embeddedFont>
+    <p:embeddedFont>
+      <p:font typeface="Calibri" panose="020F0502020204030204" pitchFamily="34" charset="0"/>
+      <p:regular r:id="rId27"/>
+      <p:bold r:id="rId28"/>
+      <p:italic r:id="rId29"/>
+      <p:boldItalic r:id="rId30"/>
     </p:embeddedFont>
   </p:embeddedFontLst>
   <p:defaultTextStyle>
@@ -4624,7 +4631,7 @@
         </p:nvSpPr>
         <p:spPr>
           <a:xfrm>
-            <a:off x="1878419" y="928577"/>
+            <a:off x="1878419" y="928578"/>
             <a:ext cx="5309191" cy="830997"/>
           </a:xfrm>
           <a:prstGeom prst="rect">
@@ -4640,18 +4647,19 @@
           <a:p>
             <a:pPr algn="ctr"/>
             <a:r>
-              <a:rPr lang="en-US" sz="4800" dirty="0">
+              <a:rPr lang="bg-BG" sz="4800" dirty="0" smtClean="0">
                 <a:solidFill>
                   <a:schemeClr val="tx1"/>
                 </a:solidFill>
-                <a:latin typeface="Be Vietnam Pro Medium" panose="020B0604020202020204" charset="0"/>
+                <a:latin typeface="+mn-lt"/>
               </a:rPr>
-              <a:t>OUR TEAM</a:t>
+              <a:t>Нашият Отбор</a:t>
             </a:r>
             <a:endParaRPr lang="bg-BG" sz="4800" dirty="0">
               <a:solidFill>
                 <a:schemeClr val="tx1"/>
               </a:solidFill>
+              <a:latin typeface="+mn-lt"/>
             </a:endParaRPr>
           </a:p>
         </p:txBody>
@@ -4703,7 +4711,7 @@
           <a:p>
             <a:pPr algn="ctr"/>
             <a:r>
-              <a:rPr lang="en-US" b="1" i="1" dirty="0">
+              <a:rPr lang="bg-BG" b="1" i="1" dirty="0" smtClean="0">
                 <a:solidFill>
                   <a:schemeClr val="tx1"/>
                 </a:solidFill>
@@ -4718,7 +4726,7 @@
                 <a:ea typeface="Calibri" panose="020F0502020204030204" pitchFamily="34" charset="0"/>
                 <a:cs typeface="Calibri" panose="020F0502020204030204" pitchFamily="34" charset="0"/>
               </a:rPr>
-              <a:t>Denislav Dimov</a:t>
+              <a:t>Денислав Димов</a:t>
             </a:r>
             <a:endParaRPr lang="bg-BG" b="1" i="1" dirty="0">
               <a:solidFill>
@@ -4762,7 +4770,7 @@
           <a:p>
             <a:pPr algn="ctr"/>
             <a:r>
-              <a:rPr lang="en-US" b="1" i="1" dirty="0">
+              <a:rPr lang="bg-BG" b="1" i="1" dirty="0" smtClean="0">
                 <a:solidFill>
                   <a:schemeClr val="tx1"/>
                 </a:solidFill>
@@ -4777,7 +4785,7 @@
                 <a:ea typeface="Calibri" panose="020F0502020204030204" pitchFamily="34" charset="0"/>
                 <a:cs typeface="Calibri" panose="020F0502020204030204" pitchFamily="34" charset="0"/>
               </a:rPr>
-              <a:t>Georgi Georgiev</a:t>
+              <a:t>Георги Георгиев</a:t>
             </a:r>
             <a:endParaRPr lang="bg-BG" b="1" i="1" dirty="0">
               <a:solidFill>
@@ -4928,10 +4936,14 @@
               <a:buNone/>
             </a:pPr>
             <a:r>
-              <a:rPr lang="en" sz="4800" dirty="0"/>
-              <a:t>OUR MISSION</a:t>
+              <a:rPr lang="bg-BG" sz="4800" dirty="0" smtClean="0">
+                <a:latin typeface="+mj-lt"/>
+              </a:rPr>
+              <a:t>Нашата Цел</a:t>
             </a:r>
-            <a:endParaRPr sz="4800" dirty="0"/>
+            <a:endParaRPr sz="4800" dirty="0">
+              <a:latin typeface="+mj-lt"/>
+            </a:endParaRPr>
           </a:p>
         </p:txBody>
       </p:sp>
@@ -4943,8 +4955,8 @@
         </p:nvSpPr>
         <p:spPr>
           <a:xfrm>
-            <a:off x="496187" y="1679945"/>
-            <a:ext cx="4153786" cy="2677656"/>
+            <a:off x="347330" y="1516914"/>
+            <a:ext cx="4309731" cy="3182678"/>
           </a:xfrm>
           <a:prstGeom prst="rect">
             <a:avLst/>
@@ -4958,12 +4970,76 @@
           <a:lstStyle/>
           <a:p>
             <a:r>
-              <a:rPr lang="en-US" dirty="0">
+              <a:rPr lang="ru-RU" dirty="0">
                 <a:solidFill>
                   <a:schemeClr val="tx1"/>
                 </a:solidFill>
               </a:rPr>
-              <a:t>Our mission is to make academic progress visible, actionable, and motivating. The Student Progress Dashboard brings together grades, attendance, assignments, and achievements in one unified platform - eliminating the guesswork and giving students a clear, real-time picture of where they stand. We believe that when students have access to the right information at the right time, they are better equipped to make decisions, stay organized, and reach their full potential. Our goal is to bridge the gap between raw academic data and meaningful personal growth.</a:t>
+              <a:t>Нашата мисия е да направим академичния напредък видим, приложим и мотивиращ. Таблото за напредък на студентите обединява оценки, присъствие, задания и постижения в една унифицирана платформа </a:t>
+            </a:r>
+            <a:r>
+              <a:rPr lang="en-US" dirty="0" smtClean="0">
+                <a:solidFill>
+                  <a:schemeClr val="tx1"/>
+                </a:solidFill>
+              </a:rPr>
+              <a:t>-</a:t>
+            </a:r>
+            <a:r>
+              <a:rPr lang="ru-RU" dirty="0" smtClean="0">
+                <a:solidFill>
+                  <a:schemeClr val="tx1"/>
+                </a:solidFill>
+              </a:rPr>
+              <a:t> </a:t>
+            </a:r>
+            <a:r>
+              <a:rPr lang="ru-RU" dirty="0">
+                <a:solidFill>
+                  <a:schemeClr val="tx1"/>
+                </a:solidFill>
+              </a:rPr>
+              <a:t>премахвайки несигурността и давайки </a:t>
+            </a:r>
+            <a:r>
+              <a:rPr lang="ru-RU" dirty="0" smtClean="0">
+                <a:solidFill>
+                  <a:schemeClr val="tx1"/>
+                </a:solidFill>
+              </a:rPr>
+              <a:t>на</a:t>
+            </a:r>
+            <a:r>
+              <a:rPr lang="en-US" dirty="0" smtClean="0">
+                <a:solidFill>
+                  <a:schemeClr val="tx1"/>
+                </a:solidFill>
+              </a:rPr>
+              <a:t> </a:t>
+            </a:r>
+            <a:r>
+              <a:rPr lang="bg-BG" dirty="0" smtClean="0">
+                <a:solidFill>
+                  <a:schemeClr val="tx1"/>
+                </a:solidFill>
+              </a:rPr>
+              <a:t>учениците</a:t>
+            </a:r>
+            <a:r>
+              <a:rPr lang="ru-RU" dirty="0" smtClean="0">
+                <a:solidFill>
+                  <a:schemeClr val="tx1"/>
+                </a:solidFill>
+              </a:rPr>
+              <a:t> </a:t>
+            </a:r>
+            <a:r>
+              <a:rPr lang="ru-RU" dirty="0">
+                <a:solidFill>
+                  <a:schemeClr val="tx1"/>
+                </a:solidFill>
+              </a:rPr>
+              <a:t>ясна картина в реално време за това къде се намират. Вярваме, че когато студентите имат достъп до правилната информация в точното време, те са по-добре подготвени да вземат решения, да останат организирани и да достигнат пълния си потенциал. Нашата цел е да запълним пропастта между суровите академични данни и значимото личностно израстване.</a:t>
             </a:r>
             <a:endParaRPr lang="bg-BG" dirty="0">
               <a:solidFill>
@@ -5116,7 +5192,7 @@
         </p:nvSpPr>
         <p:spPr>
           <a:xfrm>
-            <a:off x="1850066" y="694660"/>
+            <a:off x="1906772" y="673396"/>
             <a:ext cx="5103628" cy="830997"/>
           </a:xfrm>
           <a:prstGeom prst="rect">
@@ -5132,18 +5208,19 @@
           <a:p>
             <a:pPr algn="ctr"/>
             <a:r>
-              <a:rPr lang="en-US" sz="4800" dirty="0">
+              <a:rPr lang="bg-BG" sz="4800" dirty="0" smtClean="0">
                 <a:solidFill>
                   <a:schemeClr val="tx1"/>
                 </a:solidFill>
-                <a:latin typeface="Be Vietnam Pro Medium" panose="020B0604020202020204" charset="0"/>
+                <a:latin typeface="+mj-lt"/>
               </a:rPr>
-              <a:t>TECH STACK</a:t>
+              <a:t>Технологии</a:t>
             </a:r>
             <a:endParaRPr lang="bg-BG" sz="4800" dirty="0">
               <a:solidFill>
                 <a:schemeClr val="tx1"/>
               </a:solidFill>
+              <a:latin typeface="+mj-lt"/>
             </a:endParaRPr>
           </a:p>
         </p:txBody>
@@ -5510,7 +5587,7 @@
         <p:spPr>
           <a:xfrm>
             <a:off x="786810" y="1672855"/>
-            <a:ext cx="7683795" cy="830997"/>
+            <a:ext cx="7683795" cy="1569660"/>
           </a:xfrm>
           <a:prstGeom prst="rect">
             <a:avLst/>
@@ -5523,20 +5600,21 @@
           </a:bodyPr>
           <a:lstStyle/>
           <a:p>
-            <a:pPr algn="just"/>
+            <a:pPr algn="ctr"/>
             <a:r>
-              <a:rPr lang="en-US" sz="4800" b="1" i="1" dirty="0">
+              <a:rPr lang="bg-BG" sz="4800" b="1" i="1" dirty="0" smtClean="0">
                 <a:solidFill>
                   <a:schemeClr val="tx1"/>
                 </a:solidFill>
-                <a:latin typeface="Be Vietnam Pro Medium" panose="020B0604020202020204" charset="0"/>
+                <a:latin typeface="+mj-lt"/>
               </a:rPr>
-              <a:t>LET’S START THE DEMO</a:t>
+              <a:t>Нека да преминем към демонстрацията</a:t>
             </a:r>
             <a:endParaRPr lang="bg-BG" sz="4800" b="1" i="1" dirty="0">
               <a:solidFill>
                 <a:schemeClr val="tx1"/>
               </a:solidFill>
+              <a:latin typeface="+mj-lt"/>
             </a:endParaRPr>
           </a:p>
         </p:txBody>
@@ -5563,7 +5641,7 @@
         </p:blipFill>
         <p:spPr>
           <a:xfrm rot="10800000" flipV="1">
-            <a:off x="4051964" y="2639649"/>
+            <a:off x="4059053" y="3383928"/>
             <a:ext cx="1040072" cy="1028515"/>
           </a:xfrm>
           <a:prstGeom prst="ellipse">
